--- a/deck/UnifyMat-pitch.pptx
+++ b/deck/UnifyMat-pitch.pptx
@@ -5756,7 +5756,7 @@
                 <a:ea typeface="Arial" pitchFamily="34" charset="-122"/>
                 <a:cs typeface="Arial" pitchFamily="34" charset="-120"/>
               </a:rPr>
-              <a:t>GAIL CSV ingested live — numbers update before your eyes</a:t>
+              <a:t>pre-flight quality check, then live ingest — numbers update on screen</a:t>
             </a:r>
             <a:endParaRPr lang="en-US" sz="1050" dirty="0"/>
           </a:p>
